--- a/public/fun/pack/pptx/talkpro/발표템플릿프리미엄_25_연말결산·회고_선셋로즈.pptx
+++ b/public/fun/pack/pptx/talkpro/발표템플릿프리미엄_25_연말결산·회고_선셋로즈.pptx
@@ -115,12 +115,12 @@
   <p:extLst>
     <p:ext uri="{521415D9-36F7-43E2-AB2F-B90AF26B5E84}">
       <p14:sectionLst xmlns:p14="http://schemas.microsoft.com/office/powerpoint/2010/main">
-        <p14:section name="시작" id="{D465014B-3703-4155-8DB9-397071E8255E}">
+        <p14:section name="시작" id="{C64E533B-BA10-4A4B-B9E3-F50C467D9F3A}">
           <p14:sldIdLst>
             <p14:sldId id="256"/>
           </p14:sldIdLst>
         </p14:section>
-        <p14:section name="본문" id="{DCF69361-394F-44D4-A434-9A45D09DDF06}">
+        <p14:section name="본문" id="{A69AEF63-61BA-476B-BEFD-F7149C6A0880}">
           <p14:sldIdLst>
             <p14:sldId id="257"/>
             <p14:sldId id="258"/>
@@ -131,7 +131,7 @@
             <p14:sldId id="263"/>
           </p14:sldIdLst>
         </p14:section>
-        <p14:section name="마무리" id="{70ACD79A-FC19-47BC-A892-0448A3E2A0C6}">
+        <p14:section name="마무리" id="{AE4B6E93-CB13-4EF6-8560-ED39858CCB46}">
           <p14:sldIdLst>
             <p14:sldId id="264"/>
           </p14:sldIdLst>
@@ -1884,7 +1884,7 @@
             </a:lvl1pPr>
           </a:lstStyle>
           <a:p>
-            <a:fld id="{2E3EFCF4-04F6-43DA-80CD-DEFFFD33281D}" type="slidenum">
+            <a:fld id="{88B87546-EB42-4686-9BA4-2B8A43847967}" type="slidenum">
               <a:rPr lang="en-US"/>
               <a:t>‹#›</a:t>
             </a:fld>
@@ -2570,7 +2570,7 @@
             </a:lvl1pPr>
           </a:lstStyle>
           <a:p>
-            <a:fld id="{28BF53FE-C9C4-4A74-BC68-BEC3D369D70D}" type="slidenum">
+            <a:fld id="{E95E38E9-43CE-46C3-8474-BA279A789335}" type="slidenum">
               <a:rPr lang="en-US"/>
               <a:t>‹#›</a:t>
             </a:fld>
@@ -3254,7 +3254,7 @@
             </a:lvl1pPr>
           </a:lstStyle>
           <a:p>
-            <a:fld id="{FCB5E97B-51C4-4A2C-9D58-32F890C6EF23}" type="slidenum">
+            <a:fld id="{1C71EF46-6679-4117-B4F8-8C43A4943999}" type="slidenum">
               <a:rPr lang="en-US"/>
               <a:t>‹#›</a:t>
             </a:fld>
@@ -4077,7 +4077,7 @@
           <a:p>
             <a:r>
               <a:rPr lang="ko-KR"/>
-              <a:t>상반기를 마치며 남은 반년을 점검합니다</a:t>
+              <a:t>중간 점검을 하며 남은 일정을 확인합니다</a:t>
             </a:r>
           </a:p>
         </p:txBody>
@@ -4105,7 +4105,7 @@
           <a:p>
             <a:r>
               <a:rPr lang="ko-KR"/>
-              <a:t>0000. 00. 00</a:t>
+              <a:t>날짜 입력</a:t>
             </a:r>
           </a:p>
         </p:txBody>
@@ -4190,7 +4190,7 @@
           <a:bodyPr/>
           <a:lstStyle/>
           <a:p>
-            <a:fld id="{FE04D2CA-E58A-4133-82F2-E4C9E59A36FD}" type="slidenum">
+            <a:fld id="{008081B0-C7DE-45B7-9751-81ACA6FA2643}" type="slidenum">
               <a:rPr lang="en-US"/>
               <a:t>‹#›</a:t>
             </a:fld>
@@ -5400,7 +5400,7 @@
           <a:bodyPr/>
           <a:lstStyle/>
           <a:p>
-            <a:fld id="{51B86BED-2C36-499A-B93D-666BD09FCCCA}" type="slidenum">
+            <a:fld id="{89DA7E8E-1E1C-4EB0-B757-0709B10BCD92}" type="slidenum">
               <a:rPr lang="en-US"/>
               <a:t>‹#›</a:t>
             </a:fld>
@@ -5488,7 +5488,7 @@
           <a:bodyPr/>
           <a:lstStyle/>
           <a:p>
-            <a:fld id="{F796F851-2FFB-4538-B3F3-3B37FA4AA001}" type="slidenum">
+            <a:fld id="{1124B1A2-D6AC-4031-954E-775CF5B3A8B0}" type="slidenum">
               <a:rPr lang="en-US"/>
               <a:t>‹#›</a:t>
             </a:fld>
@@ -6467,7 +6467,7 @@
           <a:bodyPr/>
           <a:lstStyle/>
           <a:p>
-            <a:fld id="{DE944C10-949D-4A95-A41C-3BBC62690CCE}" type="slidenum">
+            <a:fld id="{255645F1-0CBE-495B-A7F4-D9E2251ED2AB}" type="slidenum">
               <a:rPr lang="en-US"/>
               <a:t>‹#›</a:t>
             </a:fld>
@@ -7119,7 +7119,7 @@
           <a:bodyPr/>
           <a:lstStyle/>
           <a:p>
-            <a:fld id="{97773F52-EDA6-40B0-B445-C7071C03F3B0}" type="slidenum">
+            <a:fld id="{0AC0F6AF-5D70-44E0-A8E2-A7B616DF11BD}" type="slidenum">
               <a:rPr lang="en-US"/>
               <a:t>‹#›</a:t>
             </a:fld>
@@ -7302,7 +7302,7 @@
           <a:bodyPr/>
           <a:lstStyle/>
           <a:p>
-            <a:fld id="{68E171C2-EA6C-4CF9-9A6C-20BEEDF21158}" type="slidenum">
+            <a:fld id="{2C5EBC36-246A-4B19-BE0C-875928B22A9E}" type="slidenum">
               <a:rPr lang="en-US"/>
               <a:t>‹#›</a:t>
             </a:fld>
@@ -8366,7 +8366,7 @@
           <a:bodyPr/>
           <a:lstStyle/>
           <a:p>
-            <a:fld id="{E0926710-B7FB-4C96-A930-CF66DBE09804}" type="slidenum">
+            <a:fld id="{536AE9B3-B74D-4BD2-AA1D-EB6D0211C22D}" type="slidenum">
               <a:rPr lang="en-US"/>
               <a:t>‹#›</a:t>
             </a:fld>
